--- a/report/答辩.pptx
+++ b/report/答辩.pptx
@@ -5,7 +5,7 @@
     <p:sldMasterId id="2147483648" r:id="rId1"/>
   </p:sldMasterIdLst>
   <p:notesMasterIdLst>
-    <p:notesMasterId r:id="rId18"/>
+    <p:notesMasterId r:id="rId19"/>
   </p:notesMasterIdLst>
   <p:sldIdLst>
     <p:sldId id="256" r:id="rId2"/>
@@ -22,8 +22,9 @@
     <p:sldId id="267" r:id="rId13"/>
     <p:sldId id="268" r:id="rId14"/>
     <p:sldId id="269" r:id="rId15"/>
-    <p:sldId id="273" r:id="rId16"/>
-    <p:sldId id="271" r:id="rId17"/>
+    <p:sldId id="274" r:id="rId16"/>
+    <p:sldId id="273" r:id="rId17"/>
+    <p:sldId id="271" r:id="rId18"/>
   </p:sldIdLst>
   <p:sldSz cx="12192000" cy="6858000"/>
   <p:notesSz cx="6858000" cy="12192000"/>
@@ -845,7 +846,7 @@
           <a:p>
             <a:fld id="{F7021451-1387-4CA6-816F-3879F97B5CBC}" type="slidenum">
               <a:rPr lang="en-US"/>
-              <a:t>15</a:t>
+              <a:t>16</a:t>
             </a:fld>
             <a:endParaRPr lang="en-US"/>
           </a:p>
@@ -932,7 +933,7 @@
           <a:p>
             <a:fld id="{F7021451-1387-4CA6-816F-3879F97B5CBC}" type="slidenum">
               <a:rPr lang="en-US"/>
-              <a:t>16</a:t>
+              <a:t>17</a:t>
             </a:fld>
             <a:endParaRPr lang="en-US"/>
           </a:p>
@@ -2137,23 +2138,19 @@
               <a:buNone/>
             </a:pPr>
             <a:r>
-              <a:rPr lang="zh-CN" altLang="en-US" sz="1600" dirty="0">
-                <a:solidFill>
-                  <a:srgbClr val="9A9A9A"/>
-                </a:solidFill>
-                <a:latin typeface="Microsoft YaHei" pitchFamily="34" charset="0"/>
-                <a:ea typeface="Microsoft YaHei" pitchFamily="34" charset="-122"/>
-              </a:rPr>
+              <a:rPr lang="zh-CN" altLang="en-US" sz="1600" dirty="0"/>
               <a:t>史大有</a:t>
             </a:r>
             <a:r>
-              <a:rPr lang="en-US" altLang="zh-CN" sz="1600" dirty="0">
-                <a:solidFill>
-                  <a:srgbClr val="9A9A9A"/>
-                </a:solidFill>
-                <a:latin typeface="Microsoft YaHei" pitchFamily="34" charset="0"/>
-                <a:ea typeface="Microsoft YaHei" pitchFamily="34" charset="-122"/>
-              </a:rPr>
+              <a:rPr lang="en-US" altLang="zh-CN" sz="1600" dirty="0"/>
+              <a:t>+</a:t>
+            </a:r>
+            <a:r>
+              <a:rPr lang="zh-CN" altLang="en-US" sz="1600" dirty="0"/>
+              <a:t>智能科学与技术</a:t>
+            </a:r>
+            <a:r>
+              <a:rPr lang="en-US" altLang="zh-CN" sz="1600" dirty="0"/>
               <a:t>+2435055016</a:t>
             </a:r>
             <a:endParaRPr lang="en-US" sz="1600" dirty="0"/>
@@ -4702,7 +4699,7 @@
                         <a:buNone/>
                       </a:pPr>
                       <a:r>
-                        <a:rPr lang="zh-CN"/>
+                        <a:rPr lang="zh-CN" dirty="0"/>
                         <a:t>0.428</a:t>
                       </a:r>
                     </a:p>
@@ -5804,10 +5801,10 @@
                         <a:buNone/>
                       </a:pPr>
                       <a:r>
-                        <a:rPr lang="zh-CN" b="1"/>
+                        <a:rPr lang="zh-CN" b="1" dirty="0"/>
                         <a:t>0.536</a:t>
                       </a:r>
-                      <a:endParaRPr lang="zh-CN"/>
+                      <a:endParaRPr lang="zh-CN" dirty="0"/>
                     </a:p>
                   </a:txBody>
                   <a:tcPr anchor="ctr">
@@ -5861,10 +5858,10 @@
                         <a:buNone/>
                       </a:pPr>
                       <a:r>
-                        <a:rPr lang="zh-CN" b="1"/>
+                        <a:rPr lang="zh-CN" b="1" dirty="0"/>
                         <a:t>0.480</a:t>
                       </a:r>
-                      <a:endParaRPr lang="zh-CN"/>
+                      <a:endParaRPr lang="zh-CN" dirty="0"/>
                     </a:p>
                   </a:txBody>
                   <a:tcPr anchor="ctr">
@@ -5918,10 +5915,10 @@
                         <a:buNone/>
                       </a:pPr>
                       <a:r>
-                        <a:rPr lang="zh-CN" b="1"/>
+                        <a:rPr lang="zh-CN" b="1" dirty="0"/>
                         <a:t>0.316</a:t>
                       </a:r>
-                      <a:endParaRPr lang="zh-CN"/>
+                      <a:endParaRPr lang="zh-CN" dirty="0"/>
                     </a:p>
                   </a:txBody>
                   <a:tcPr anchor="ctr">
@@ -6220,8 +6217,8 @@
           </a:p>
         </p:txBody>
       </p:sp>
-      <mc:AlternateContent xmlns:mc="http://schemas.openxmlformats.org/markup-compatibility/2006">
-        <mc:Choice xmlns:a14="http://schemas.microsoft.com/office/drawing/2010/main" Requires="a14">
+      <mc:AlternateContent xmlns:mc="http://schemas.openxmlformats.org/markup-compatibility/2006" xmlns:a14="http://schemas.microsoft.com/office/drawing/2010/main">
+        <mc:Choice Requires="a14">
           <p:sp>
             <p:nvSpPr>
               <p:cNvPr id="11" name="文本框 10">
@@ -6263,13 +6260,7 @@
                       <a:rPr lang="zh-CN" altLang="en-US" sz="2400" i="1" dirty="0" smtClean="0">
                         <a:latin typeface="Cambria Math" panose="02040503050406030204" pitchFamily="18" charset="0"/>
                       </a:rPr>
-                      <m:t>背景</m:t>
-                    </m:r>
-                    <m:r>
-                      <a:rPr lang="zh-CN" altLang="en-US" sz="2400" i="1" dirty="0" smtClean="0">
-                        <a:latin typeface="Cambria Math" panose="02040503050406030204" pitchFamily="18" charset="0"/>
-                      </a:rPr>
-                      <m:t>，</m:t>
+                      <m:t>背景，</m:t>
                     </m:r>
                     <m:r>
                       <a:rPr lang="en-US" altLang="zh-CN" sz="2400" i="1" dirty="0">
@@ -6596,7 +6587,7 @@
             </p:txBody>
           </p:sp>
         </mc:Choice>
-        <mc:Fallback>
+        <mc:Fallback xmlns="">
           <p:sp>
             <p:nvSpPr>
               <p:cNvPr id="11" name="文本框 10">
@@ -6641,8 +6632,8 @@
           </p:sp>
         </mc:Fallback>
       </mc:AlternateContent>
-      <mc:AlternateContent xmlns:mc="http://schemas.openxmlformats.org/markup-compatibility/2006">
-        <mc:Choice xmlns:a14="http://schemas.microsoft.com/office/drawing/2010/main" Requires="a14">
+      <mc:AlternateContent xmlns:mc="http://schemas.openxmlformats.org/markup-compatibility/2006" xmlns:a14="http://schemas.microsoft.com/office/drawing/2010/main">
+        <mc:Choice Requires="a14">
           <p:sp>
             <p:nvSpPr>
               <p:cNvPr id="6" name="文本框 5">
@@ -6728,7 +6719,7 @@
             </p:txBody>
           </p:sp>
         </mc:Choice>
-        <mc:Fallback>
+        <mc:Fallback xmlns="">
           <p:sp>
             <p:nvSpPr>
               <p:cNvPr id="6" name="文本框 5">
@@ -8654,7 +8645,15 @@
 
 <file path=ppt/slides/slide15.xml><?xml version="1.0" encoding="utf-8"?>
 <p:sld xmlns:a="http://schemas.openxmlformats.org/drawingml/2006/main" xmlns:r="http://schemas.openxmlformats.org/officeDocument/2006/relationships" xmlns:p="http://schemas.openxmlformats.org/presentationml/2006/main">
-  <p:cSld>
+  <p:cSld name="Slide 13">
+    <p:bg>
+      <p:bgPr>
+        <a:solidFill>
+          <a:srgbClr val="FFFFFF"/>
+        </a:solidFill>
+        <a:effectLst/>
+      </p:bgPr>
+    </p:bg>
     <p:spTree>
       <p:nvGrpSpPr>
         <p:cNvPr id="1" name=""/>
@@ -8741,7 +8740,7 @@
                 <a:ea typeface="Microsoft YaHei" pitchFamily="34" charset="-122"/>
                 <a:cs typeface="Microsoft YaHei" pitchFamily="34" charset="-120"/>
               </a:rPr>
-              <a:t>结论</a:t>
+              <a:t>反思：非线性 SVM 为何反不及线性 LR？</a:t>
             </a:r>
             <a:endParaRPr lang="en-US" sz="2600" dirty="0"/>
           </a:p>
@@ -8817,6 +8816,314 @@
         </p:nvSpPr>
         <p:spPr>
           <a:xfrm>
+            <a:off x="1650000" y="1440000"/>
+            <a:ext cx="8892000" cy="3420000"/>
+          </a:xfrm>
+          <a:prstGeom prst="roundRect">
+            <a:avLst>
+              <a:gd name="adj" fmla="val 962"/>
+            </a:avLst>
+          </a:prstGeom>
+          <a:solidFill>
+            <a:srgbClr val="FCFCFC"/>
+          </a:solidFill>
+          <a:ln w="12700">
+            <a:solidFill>
+              <a:srgbClr val="CFCFCF"/>
+            </a:solidFill>
+            <a:prstDash val="dash"/>
+          </a:ln>
+        </p:spPr>
+      </p:sp>
+      <p:sp>
+        <p:nvSpPr>
+          <p:cNvPr id="8" name="Shape 6"/>
+          <p:cNvSpPr/>
+          <p:nvPr/>
+        </p:nvSpPr>
+        <p:spPr>
+          <a:xfrm>
+            <a:off x="548640" y="4980000"/>
+            <a:ext cx="11091672" cy="1420000"/>
+          </a:xfrm>
+          <a:prstGeom prst="roundRect">
+            <a:avLst>
+              <a:gd name="adj" fmla="val 1678"/>
+            </a:avLst>
+          </a:prstGeom>
+          <a:solidFill>
+            <a:srgbClr val="F6F6F6"/>
+          </a:solidFill>
+          <a:ln w="9525">
+            <a:solidFill>
+              <a:srgbClr val="CFCFCF"/>
+            </a:solidFill>
+            <a:prstDash val="solid"/>
+          </a:ln>
+        </p:spPr>
+      </p:sp>
+      <p:sp>
+        <p:nvSpPr>
+          <p:cNvPr id="9" name="Text 7"/>
+          <p:cNvSpPr/>
+          <p:nvPr/>
+        </p:nvSpPr>
+        <p:spPr>
+          <a:xfrm>
+            <a:off x="728640" y="5100000"/>
+            <a:ext cx="10734000" cy="1180000"/>
+          </a:xfrm>
+          <a:prstGeom prst="rect">
+            <a:avLst/>
+          </a:prstGeom>
+          <a:noFill/>
+          <a:ln/>
+        </p:spPr>
+        <p:txBody>
+          <a:bodyPr wrap="square" rtlCol="0" anchor="t"/>
+          <a:lstStyle/>
+          <a:p>
+            <a:r>
+              <a:rPr lang="zh-CN" altLang="zh-CN" sz="1600" b="1" dirty="0"/>
+              <a:t>现象　</a:t>
+            </a:r>
+            <a:r>
+              <a:rPr lang="zh-CN" altLang="zh-CN" sz="1600" dirty="0"/>
+              <a:t>SVM 验证集 Dice 0.159 远高于测试集 0.040（过拟合）；LR 验证 / 测试接近（0.104 / 0.089）。</a:t>
+            </a:r>
+            <a:endParaRPr lang="en-US" altLang="zh-CN" sz="1600" dirty="0"/>
+          </a:p>
+          <a:p>
+            <a:r>
+              <a:rPr lang="zh-CN" altLang="zh-CN" sz="1600" b="1" dirty="0"/>
+              <a:t>证据　</a:t>
+            </a:r>
+            <a:r>
+              <a:rPr lang="zh-CN" altLang="zh-CN" sz="1600" dirty="0"/>
+              <a:t>与阈值无关的测试 PR-AUC，SVM 在所有 γ 下均低于 LR（0.165）；且 γ 越大、非线性越强，PR-AUC 单调下降（0.137→0.091）。</a:t>
+            </a:r>
+            <a:endParaRPr lang="en-US" altLang="zh-CN" sz="1600" dirty="0"/>
+          </a:p>
+          <a:p>
+            <a:r>
+              <a:rPr lang="zh-CN" altLang="zh-CN" sz="1600" b="1" dirty="0"/>
+              <a:t>原因　</a:t>
+            </a:r>
+            <a:r>
+              <a:rPr lang="zh-CN" altLang="zh-CN" sz="1600" dirty="0"/>
+              <a:t>14 维“亮+黄”特征已近似线性可分；32 张小样本下，过高的模型复杂度只会过拟合 </a:t>
+            </a:r>
+            <a:r>
+              <a:rPr lang="zh-CN" altLang="zh-CN" sz="1400" dirty="0"/>
+              <a:t>。</a:t>
+            </a:r>
+            <a:endParaRPr lang="en-US" altLang="zh-CN" sz="1400" dirty="0"/>
+          </a:p>
+        </p:txBody>
+      </p:sp>
+      <p:pic>
+        <p:nvPicPr>
+          <p:cNvPr id="11" name="图片 10">
+            <a:extLst>
+              <a:ext uri="{FF2B5EF4-FFF2-40B4-BE49-F238E27FC236}">
+                <a16:creationId xmlns:a16="http://schemas.microsoft.com/office/drawing/2014/main" id="{FB4879CF-9C2D-A36A-DB7A-759D05E88420}"/>
+              </a:ext>
+            </a:extLst>
+          </p:cNvPr>
+          <p:cNvPicPr>
+            <a:picLocks noChangeAspect="1"/>
+          </p:cNvPicPr>
+          <p:nvPr/>
+        </p:nvPicPr>
+        <p:blipFill>
+          <a:blip r:embed="rId2"/>
+          <a:stretch>
+            <a:fillRect/>
+          </a:stretch>
+        </p:blipFill>
+        <p:spPr>
+          <a:xfrm>
+            <a:off x="1867000" y="1500000"/>
+            <a:ext cx="8458000" cy="3300000"/>
+          </a:xfrm>
+          <a:prstGeom prst="rect">
+            <a:avLst/>
+          </a:prstGeom>
+        </p:spPr>
+      </p:pic>
+    </p:spTree>
+  </p:cSld>
+  <p:clrMapOvr>
+    <a:masterClrMapping/>
+  </p:clrMapOvr>
+</p:sld>
+</file>
+
+<file path=ppt/slides/slide16.xml><?xml version="1.0" encoding="utf-8"?>
+<p:sld xmlns:a="http://schemas.openxmlformats.org/drawingml/2006/main" xmlns:r="http://schemas.openxmlformats.org/officeDocument/2006/relationships" xmlns:p="http://schemas.openxmlformats.org/presentationml/2006/main">
+  <p:cSld>
+    <p:spTree>
+      <p:nvGrpSpPr>
+        <p:cNvPr id="1" name=""/>
+        <p:cNvGrpSpPr/>
+        <p:nvPr/>
+      </p:nvGrpSpPr>
+      <p:grpSpPr>
+        <a:xfrm>
+          <a:off x="0" y="0"/>
+          <a:ext cx="0" cy="0"/>
+          <a:chOff x="0" y="0"/>
+          <a:chExt cx="0" cy="0"/>
+        </a:xfrm>
+      </p:grpSpPr>
+      <p:sp>
+        <p:nvSpPr>
+          <p:cNvPr id="2" name="Text 0"/>
+          <p:cNvSpPr/>
+          <p:nvPr/>
+        </p:nvSpPr>
+        <p:spPr>
+          <a:xfrm>
+            <a:off x="548640" y="292608"/>
+            <a:ext cx="5486400" cy="320040"/>
+          </a:xfrm>
+          <a:prstGeom prst="rect">
+            <a:avLst/>
+          </a:prstGeom>
+          <a:noFill/>
+          <a:ln/>
+        </p:spPr>
+        <p:txBody>
+          <a:bodyPr wrap="square" rtlCol="0" anchor="ctr"/>
+          <a:lstStyle/>
+          <a:p>
+            <a:pPr marL="0" indent="0">
+              <a:buNone/>
+            </a:pPr>
+            <a:r>
+              <a:rPr lang="en-US" sz="1200" b="1" kern="0" spc="100" dirty="0">
+                <a:solidFill>
+                  <a:srgbClr val="3A6EA5"/>
+                </a:solidFill>
+                <a:latin typeface="Microsoft YaHei" pitchFamily="34" charset="0"/>
+                <a:ea typeface="Microsoft YaHei" pitchFamily="34" charset="-122"/>
+                <a:cs typeface="Microsoft YaHei" pitchFamily="34" charset="-120"/>
+              </a:rPr>
+              <a:t>四、结果与原因分析</a:t>
+            </a:r>
+            <a:endParaRPr lang="en-US" sz="1200" dirty="0"/>
+          </a:p>
+        </p:txBody>
+      </p:sp>
+      <p:sp>
+        <p:nvSpPr>
+          <p:cNvPr id="3" name="Text 1"/>
+          <p:cNvSpPr/>
+          <p:nvPr/>
+        </p:nvSpPr>
+        <p:spPr>
+          <a:xfrm>
+            <a:off x="548640" y="566928"/>
+            <a:ext cx="11064240" cy="640080"/>
+          </a:xfrm>
+          <a:prstGeom prst="rect">
+            <a:avLst/>
+          </a:prstGeom>
+          <a:noFill/>
+          <a:ln/>
+        </p:spPr>
+        <p:txBody>
+          <a:bodyPr wrap="square" rtlCol="0" anchor="ctr"/>
+          <a:lstStyle/>
+          <a:p>
+            <a:pPr marL="0" indent="0">
+              <a:buNone/>
+            </a:pPr>
+            <a:r>
+              <a:rPr lang="en-US" sz="2600" b="1" dirty="0">
+                <a:solidFill>
+                  <a:srgbClr val="222222"/>
+                </a:solidFill>
+                <a:latin typeface="Microsoft YaHei" pitchFamily="34" charset="0"/>
+                <a:ea typeface="Microsoft YaHei" pitchFamily="34" charset="-122"/>
+                <a:cs typeface="Microsoft YaHei" pitchFamily="34" charset="-120"/>
+              </a:rPr>
+              <a:t>结论</a:t>
+            </a:r>
+            <a:endParaRPr lang="en-US" sz="2600" dirty="0"/>
+          </a:p>
+        </p:txBody>
+      </p:sp>
+      <p:sp>
+        <p:nvSpPr>
+          <p:cNvPr id="4" name="Shape 2"/>
+          <p:cNvSpPr/>
+          <p:nvPr/>
+        </p:nvSpPr>
+        <p:spPr>
+          <a:xfrm>
+            <a:off x="548640" y="1298448"/>
+            <a:ext cx="11091672" cy="0"/>
+          </a:xfrm>
+          <a:prstGeom prst="line">
+            <a:avLst/>
+          </a:prstGeom>
+          <a:noFill/>
+          <a:ln w="12700">
+            <a:solidFill>
+              <a:srgbClr val="CFCFCF"/>
+            </a:solidFill>
+            <a:prstDash val="solid"/>
+          </a:ln>
+        </p:spPr>
+      </p:sp>
+      <p:sp>
+        <p:nvSpPr>
+          <p:cNvPr id="5" name="Text 3"/>
+          <p:cNvSpPr/>
+          <p:nvPr/>
+        </p:nvSpPr>
+        <p:spPr>
+          <a:xfrm>
+            <a:off x="11612880" y="6446520"/>
+            <a:ext cx="457200" cy="274320"/>
+          </a:xfrm>
+          <a:prstGeom prst="rect">
+            <a:avLst/>
+          </a:prstGeom>
+          <a:noFill/>
+          <a:ln/>
+        </p:spPr>
+        <p:txBody>
+          <a:bodyPr wrap="square" rtlCol="0" anchor="ctr"/>
+          <a:lstStyle/>
+          <a:p>
+            <a:pPr marL="0" indent="0" algn="r">
+              <a:buNone/>
+            </a:pPr>
+            <a:r>
+              <a:rPr lang="en-US" sz="1000" dirty="0">
+                <a:solidFill>
+                  <a:srgbClr val="8A8A8A"/>
+                </a:solidFill>
+                <a:latin typeface="Microsoft YaHei" pitchFamily="34" charset="0"/>
+                <a:ea typeface="Microsoft YaHei" pitchFamily="34" charset="-122"/>
+                <a:cs typeface="Microsoft YaHei" pitchFamily="34" charset="-120"/>
+              </a:rPr>
+              <a:t>16</a:t>
+            </a:r>
+            <a:endParaRPr lang="en-US" sz="1000" dirty="0"/>
+          </a:p>
+        </p:txBody>
+      </p:sp>
+      <p:sp>
+        <p:nvSpPr>
+          <p:cNvPr id="6" name="Shape 4"/>
+          <p:cNvSpPr/>
+          <p:nvPr/>
+        </p:nvSpPr>
+        <p:spPr>
+          <a:xfrm>
             <a:off x="685800" y="1911096"/>
             <a:ext cx="146304" cy="146304"/>
           </a:xfrm>
@@ -9153,7 +9460,7 @@
 </p:sld>
 </file>
 
-<file path=ppt/slides/slide16.xml><?xml version="1.0" encoding="utf-8"?>
+<file path=ppt/slides/slide17.xml><?xml version="1.0" encoding="utf-8"?>
 <p:sld xmlns:a="http://schemas.openxmlformats.org/drawingml/2006/main" xmlns:r="http://schemas.openxmlformats.org/officeDocument/2006/relationships" xmlns:p="http://schemas.openxmlformats.org/presentationml/2006/main">
   <p:cSld name="Slide 16">
     <p:bg>
@@ -9241,17 +9548,6 @@
             <a:pPr marL="0" indent="0" algn="ctr">
               <a:buNone/>
             </a:pPr>
-            <a:r>
-              <a:rPr lang="en-US" sz="1800" dirty="0">
-                <a:solidFill>
-                  <a:srgbClr val="8A8A8A"/>
-                </a:solidFill>
-                <a:latin typeface="Microsoft YaHei" pitchFamily="34" charset="0"/>
-                <a:ea typeface="Microsoft YaHei" pitchFamily="34" charset="-122"/>
-                <a:cs typeface="Microsoft YaHei" pitchFamily="34" charset="-120"/>
-              </a:rPr>
-              <a:t>Q &amp; A</a:t>
-            </a:r>
             <a:endParaRPr lang="en-US" sz="1800" dirty="0"/>
           </a:p>
         </p:txBody>
@@ -10362,8 +10658,38 @@
         </p:blipFill>
         <p:spPr>
           <a:xfrm>
-            <a:off x="8097328" y="1733995"/>
-            <a:ext cx="3207734" cy="2138489"/>
+            <a:off x="8181252" y="1666416"/>
+            <a:ext cx="3067970" cy="2045313"/>
+          </a:xfrm>
+          <a:prstGeom prst="rect">
+            <a:avLst/>
+          </a:prstGeom>
+        </p:spPr>
+      </p:pic>
+      <p:pic>
+        <p:nvPicPr>
+          <p:cNvPr id="10" name="图片 9">
+            <a:extLst>
+              <a:ext uri="{FF2B5EF4-FFF2-40B4-BE49-F238E27FC236}">
+                <a16:creationId xmlns:a16="http://schemas.microsoft.com/office/drawing/2014/main" id="{9E6A75B8-80D5-06DE-AB09-C945DAAC2394}"/>
+              </a:ext>
+            </a:extLst>
+          </p:cNvPr>
+          <p:cNvPicPr>
+            <a:picLocks noChangeAspect="1"/>
+          </p:cNvPicPr>
+          <p:nvPr/>
+        </p:nvPicPr>
+        <p:blipFill>
+          <a:blip r:embed="rId4"/>
+          <a:stretch>
+            <a:fillRect/>
+          </a:stretch>
+        </p:blipFill>
+        <p:spPr>
+          <a:xfrm>
+            <a:off x="8198822" y="3807803"/>
+            <a:ext cx="3067970" cy="1952917"/>
           </a:xfrm>
           <a:prstGeom prst="rect">
             <a:avLst/>
@@ -10875,7 +11201,7 @@
         <p:spPr>
           <a:xfrm>
             <a:off x="548640" y="1463039"/>
-            <a:ext cx="11091672" cy="1829949"/>
+            <a:ext cx="11091672" cy="2124854"/>
           </a:xfrm>
           <a:prstGeom prst="roundRect">
             <a:avLst>
@@ -10902,7 +11228,7 @@
         <p:spPr>
           <a:xfrm>
             <a:off x="777240" y="1555628"/>
-            <a:ext cx="10634472" cy="1676401"/>
+            <a:ext cx="10634472" cy="1987694"/>
           </a:xfrm>
           <a:prstGeom prst="rect">
             <a:avLst/>
@@ -10915,91 +11241,91 @@
           <a:lstStyle/>
           <a:p>
             <a:r>
-              <a:rPr lang="zh-CN" altLang="zh-CN" sz="1400" dirty="0"/>
+              <a:rPr lang="zh-CN" altLang="zh-CN" dirty="0"/>
               <a:t>① </a:t>
             </a:r>
             <a:r>
-              <a:rPr lang="zh-CN" altLang="zh-CN" sz="1400" b="1" dirty="0"/>
+              <a:rPr lang="zh-CN" altLang="zh-CN" b="1" dirty="0"/>
               <a:t>统一缩放 672×448</a:t>
             </a:r>
             <a:r>
-              <a:rPr lang="zh-CN" altLang="zh-CN" sz="1400" dirty="0"/>
+              <a:rPr lang="zh-CN" altLang="zh-CN" dirty="0"/>
               <a:t>：尺寸统一便于批训练；保留约 1.5:1 长宽比；可被 32 整除以适配编码器。</a:t>
             </a:r>
           </a:p>
           <a:p>
             <a:r>
-              <a:rPr lang="zh-CN" altLang="zh-CN" sz="1400" dirty="0"/>
+              <a:rPr lang="zh-CN" altLang="zh-CN" dirty="0"/>
               <a:t>② </a:t>
             </a:r>
             <a:r>
-              <a:rPr lang="zh-CN" altLang="zh-CN" sz="1400" b="1" dirty="0"/>
+              <a:rPr lang="zh-CN" altLang="zh-CN" b="1" dirty="0"/>
               <a:t>FOV 视野掩膜</a:t>
             </a:r>
             <a:r>
-              <a:rPr lang="zh-CN" altLang="zh-CN" sz="1400" dirty="0"/>
+              <a:rPr lang="zh-CN" altLang="zh-CN" dirty="0"/>
               <a:t>：排除眼底四周黑边，所有指标只在视野内统计。</a:t>
             </a:r>
           </a:p>
           <a:p>
             <a:r>
-              <a:rPr lang="zh-CN" altLang="zh-CN" sz="1400" dirty="0"/>
+              <a:rPr lang="zh-CN" altLang="zh-CN" dirty="0"/>
               <a:t>③ </a:t>
             </a:r>
             <a:r>
-              <a:rPr lang="zh-CN" altLang="zh-CN" sz="1400" b="1" dirty="0"/>
+              <a:rPr lang="zh-CN" altLang="zh-CN" b="1" dirty="0"/>
               <a:t>去光照（亮度归一化）</a:t>
             </a:r>
             <a:r>
-              <a:rPr lang="zh-CN" altLang="zh-CN" sz="1400" dirty="0"/>
+              <a:rPr lang="zh-CN" altLang="zh-CN" dirty="0"/>
               <a:t>：大尺度背景估计并减除，消除不均匀照明。</a:t>
             </a:r>
           </a:p>
           <a:p>
             <a:r>
-              <a:rPr lang="zh-CN" altLang="zh-CN" sz="1400" dirty="0"/>
+              <a:rPr lang="zh-CN" altLang="zh-CN" dirty="0"/>
               <a:t>④ </a:t>
             </a:r>
             <a:r>
-              <a:rPr lang="zh-CN" altLang="zh-CN" sz="1400" b="1" dirty="0"/>
+              <a:rPr lang="zh-CN" altLang="zh-CN" b="1" dirty="0"/>
               <a:t>CLAHE 对比增强</a:t>
             </a:r>
             <a:r>
-              <a:rPr lang="zh-CN" altLang="zh-CN" sz="1400" dirty="0"/>
+              <a:rPr lang="zh-CN" altLang="zh-CN" dirty="0"/>
               <a:t>：限制对比度自适应均衡，突出亮病灶。</a:t>
             </a:r>
           </a:p>
           <a:p>
             <a:r>
-              <a:rPr lang="zh-CN" altLang="zh-CN" sz="1400" dirty="0"/>
+              <a:rPr lang="zh-CN" altLang="zh-CN" dirty="0"/>
               <a:t>⑤ </a:t>
             </a:r>
             <a:r>
-              <a:rPr lang="zh-CN" altLang="zh-CN" sz="1400" b="1" dirty="0"/>
+              <a:rPr lang="zh-CN" altLang="zh-CN" b="1" dirty="0"/>
               <a:t>特征标准化</a:t>
             </a:r>
             <a:r>
-              <a:rPr lang="zh-CN" altLang="zh-CN" sz="1400" dirty="0"/>
+              <a:rPr lang="zh-CN" altLang="zh-CN" dirty="0"/>
               <a:t>（LR/SVM 对尺度敏感）；U-Net 用 ImageNet 归一化 + 数据增强。</a:t>
             </a:r>
           </a:p>
           <a:p>
             <a:r>
-              <a:rPr lang="zh-CN" altLang="zh-CN" sz="1400" dirty="0"/>
+              <a:rPr lang="zh-CN" altLang="zh-CN" dirty="0"/>
               <a:t>三种方法</a:t>
             </a:r>
             <a:r>
-              <a:rPr lang="zh-CN" altLang="zh-CN" sz="1400" b="1" dirty="0"/>
+              <a:rPr lang="zh-CN" altLang="zh-CN" b="1" dirty="0"/>
               <a:t>共享同一预处理</a:t>
             </a:r>
             <a:r>
-              <a:rPr lang="zh-CN" altLang="zh-CN" sz="1400" dirty="0"/>
+              <a:rPr lang="zh-CN" altLang="zh-CN" dirty="0"/>
               <a:t>，保证对比公平。</a:t>
             </a:r>
           </a:p>
           <a:p>
             <a:r>
-              <a:rPr lang="zh-CN" altLang="zh-CN" sz="1400" dirty="0"/>
+              <a:rPr lang="zh-CN" altLang="zh-CN" dirty="0"/>
               <a:t>读图：原图 → 去光照+CLAHE → 金标准掩膜 → 渗出液叠加。</a:t>
             </a:r>
           </a:p>
@@ -11013,8 +11339,8 @@
         </p:nvSpPr>
         <p:spPr>
           <a:xfrm>
-            <a:off x="548640" y="3384430"/>
-            <a:ext cx="11091672" cy="3017520"/>
+            <a:off x="507545" y="3783724"/>
+            <a:ext cx="11132767" cy="2618225"/>
           </a:xfrm>
           <a:prstGeom prst="roundRect">
             <a:avLst>
@@ -11054,7 +11380,7 @@
         </p:blipFill>
         <p:spPr>
           <a:xfrm>
-            <a:off x="548640" y="3630827"/>
+            <a:off x="592783" y="3977668"/>
             <a:ext cx="11091672" cy="2034506"/>
           </a:xfrm>
           <a:prstGeom prst="rect">
@@ -11677,7 +12003,15 @@
             </a:r>
             <a:r>
               <a:rPr lang="zh-CN" altLang="zh-CN" sz="2000" dirty="0"/>
-              <a:t>：同预处理 · 同 32/15 划分 · 同指标计算 → 公平对比。</a:t>
+              <a:t>：同预处理 · 同 32/15 划分 </a:t>
+            </a:r>
+            <a:r>
+              <a:rPr lang="zh-CN" altLang="en-US" sz="2000" dirty="0"/>
+              <a:t>，</a:t>
+            </a:r>
+            <a:r>
+              <a:rPr lang="zh-CN" altLang="zh-CN" sz="2000" dirty="0"/>
+              <a:t>同指标计算 → 公平对比。</a:t>
             </a:r>
             <a:endParaRPr lang="en-US" altLang="zh-CN" sz="2000" dirty="0"/>
           </a:p>
@@ -14403,8 +14737,8 @@
           </a:p>
         </p:txBody>
       </p:sp>
-      <mc:AlternateContent xmlns:mc="http://schemas.openxmlformats.org/markup-compatibility/2006">
-        <mc:Choice xmlns:a14="http://schemas.microsoft.com/office/drawing/2010/main" Requires="a14">
+      <mc:AlternateContent xmlns:mc="http://schemas.openxmlformats.org/markup-compatibility/2006" xmlns:a14="http://schemas.microsoft.com/office/drawing/2010/main">
+        <mc:Choice Requires="a14">
           <p:sp>
             <p:nvSpPr>
               <p:cNvPr id="8" name="Shape 4">
@@ -15227,7 +15561,7 @@
             </p:txBody>
           </p:sp>
         </mc:Choice>
-        <mc:Fallback>
+        <mc:Fallback xmlns="">
           <p:sp>
             <p:nvSpPr>
               <p:cNvPr id="8" name="Shape 4">
